--- a/assets/figures-editable/appendix-studies/a-e21.pptx
+++ b/assets/figures-editable/appendix-studies/a-e21.pptx
@@ -7,7 +7,7 @@
   <p:sldIdLst>
     <p:sldId id="256" r:id="rId7"/>
   </p:sldIdLst>
-  <p:sldSz cx="8961120" cy="5239512" type="screen4x3"/>
+  <p:sldSz cx="12191695" cy="6858000" type="screen4x3"/>
   <p:notesSz cx="6858000" cy="9144000"/>
   <p:defaultTextStyle>
     <a:defPPr>
@@ -3098,14 +3098,14 @@
       <p:grpSpPr/>
       <p:sp>
         <p:nvSpPr>
-          <p:cNvPr id="2" name="text 0" descr="sci-ppt:obj-000"/>
+          <p:cNvPr id="2" name="A-E21 text 0" descr="sci-ppt:o000"/>
           <p:cNvSpPr txBox="1"/>
           <p:nvPr/>
         </p:nvSpPr>
         <p:spPr>
           <a:xfrm>
-            <a:off x="256032" y="137160"/>
-            <a:ext cx="7315200" cy="310896"/>
+            <a:off x="274320" y="118872"/>
+            <a:ext cx="11612880" cy="340105"/>
           </a:xfrm>
           <a:prstGeom prst="rect">
             <a:avLst/>
@@ -3114,7 +3114,7 @@
           <a:effectLst/>
         </p:spPr>
         <p:txBody>
-          <a:bodyPr wrap="none" lIns="0" rIns="0" tIns="0" bIns="0" anchor="ctr">
+          <a:bodyPr wrap="none" lIns="18288" rIns="18288" tIns="18288" bIns="18288" anchor="t">
             <a:spAutoFit/>
           </a:bodyPr>
           <a:lstStyle/>
@@ -3125,67 +3125,117 @@
               </a:spcAft>
             </a:pPr>
             <a:r>
-              <a:rPr sz="1439" b="0" i="0">
+              <a:rPr sz="1900" b="1" i="0">
                 <a:solidFill>
                   <a:srgbClr val="8EDBD4"/>
                 </a:solidFill>
                 <a:latin typeface="Arial"/>
               </a:rPr>
-              <a:t>A-E21 · Physical variable map</a:t>
-            </a:r>
-          </a:p>
-        </p:txBody>
-      </p:sp>
-      <p:sp>
-        <p:nvSpPr>
-          <p:cNvPr id="3" name="ellipse 1" descr="sci-ppt:obj-001"/>
-          <p:cNvSpPr/>
+              <a:t>A-E21 · Original radial control recalled</a:t>
+            </a:r>
+          </a:p>
+        </p:txBody>
+      </p:sp>
+      <p:sp>
+        <p:nvSpPr>
+          <p:cNvPr id="3" name="A-E21 text 1" descr="sci-ppt:o001"/>
+          <p:cNvSpPr txBox="1"/>
           <p:nvPr/>
         </p:nvSpPr>
         <p:spPr>
           <a:xfrm>
-            <a:off x="1060704" y="914400"/>
-            <a:ext cx="1463040" cy="1463040"/>
-          </a:xfrm>
-          <a:prstGeom prst="ellipse">
+            <a:off x="457200" y="914400"/>
+            <a:ext cx="11247120" cy="254889"/>
+          </a:xfrm>
+          <a:prstGeom prst="rect">
             <a:avLst/>
           </a:prstGeom>
           <a:noFill/>
-          <a:ln w="17780">
-            <a:solidFill>
-              <a:srgbClr val="B4C7D2"/>
-            </a:solidFill>
-          </a:ln>
           <a:effectLst/>
         </p:spPr>
         <p:txBody>
-          <a:bodyPr rtlCol="0" anchor="ctr"/>
-          <a:lstStyle/>
-          <a:p>
-            <a:pPr algn="ctr"/>
-          </a:p>
-        </p:txBody>
-      </p:sp>
-      <p:sp>
-        <p:nvSpPr>
-          <p:cNvPr id="4" name="ellipse 2" descr="sci-ppt:obj-002"/>
+          <a:bodyPr wrap="none" lIns="18288" rIns="18288" tIns="18288" bIns="18288" anchor="t">
+            <a:spAutoFit/>
+          </a:bodyPr>
+          <a:lstStyle/>
+          <a:p>
+            <a:pPr algn="l">
+              <a:spcAft>
+                <a:spcPts val="0"/>
+              </a:spcAft>
+            </a:pPr>
+            <a:r>
+              <a:rPr sz="1350" b="1" i="0">
+                <a:solidFill>
+                  <a:srgbClr val="8EDBD4"/>
+                </a:solidFill>
+                <a:latin typeface="Arial"/>
+              </a:rPr>
+              <a:t>Recalled radial control: expansion and resistance, not an outlet</a:t>
+            </a:r>
+          </a:p>
+        </p:txBody>
+      </p:sp>
+      <p:sp>
+        <p:nvSpPr>
+          <p:cNvPr id="4" name="A-E21 text 2" descr="sci-ppt:o002"/>
+          <p:cNvSpPr txBox="1"/>
+          <p:nvPr/>
+        </p:nvSpPr>
+        <p:spPr>
+          <a:xfrm>
+            <a:off x="457200" y="1371600"/>
+            <a:ext cx="11247120" cy="293623"/>
+          </a:xfrm>
+          <a:prstGeom prst="rect">
+            <a:avLst/>
+          </a:prstGeom>
+          <a:noFill/>
+          <a:effectLst/>
+        </p:spPr>
+        <p:txBody>
+          <a:bodyPr wrap="none" lIns="18288" rIns="18288" tIns="18288" bIns="18288" anchor="t">
+            <a:spAutoFit/>
+          </a:bodyPr>
+          <a:lstStyle/>
+          <a:p>
+            <a:pPr algn="ctr">
+              <a:spcAft>
+                <a:spcPts val="0"/>
+              </a:spcAft>
+            </a:pPr>
+            <a:r>
+              <a:rPr sz="1600" b="1" i="0">
+                <a:solidFill>
+                  <a:srgbClr val="E7F0F3"/>
+                </a:solidFill>
+                <a:latin typeface="Arial"/>
+              </a:rPr>
+              <a:t>ρ_g(RR̈ + 3Ṙ²/2) = p_b − p_∞ − 2σ/R − pₑₗ(R) − 4η_gṘ/R</a:t>
+            </a:r>
+          </a:p>
+        </p:txBody>
+      </p:sp>
+      <p:sp>
+        <p:nvSpPr>
+          <p:cNvPr id="5" name="A-E21 round_rect 3" descr="sci-ppt:o003"/>
           <p:cNvSpPr/>
           <p:nvPr/>
         </p:nvSpPr>
         <p:spPr>
           <a:xfrm>
-            <a:off x="1463040" y="1316736"/>
-            <a:ext cx="658368" cy="658368"/>
-          </a:xfrm>
-          <a:prstGeom prst="ellipse">
+            <a:off x="457200" y="2286000"/>
+            <a:ext cx="2148840" cy="1554480"/>
+          </a:xfrm>
+          <a:prstGeom prst="roundRect">
             <a:avLst/>
           </a:prstGeom>
           <a:solidFill>
             <a:srgbClr val="213E4B"/>
           </a:solidFill>
-          <a:ln w="17780">
+          <a:ln w="20320">
             <a:solidFill>
-              <a:srgbClr val="B4C7D2"/>
+              <a:srgbClr val="7FC8F8"/>
             </a:solidFill>
           </a:ln>
           <a:effectLst/>
@@ -3198,40 +3248,16 @@
           </a:p>
         </p:txBody>
       </p:sp>
-      <p:cxnSp>
-        <p:nvCxnSpPr>
-          <p:cNvPr id="5" name="arrow 3" descr="sci-ppt:obj-003"/>
-          <p:cNvCxnSpPr/>
-          <p:nvPr/>
-        </p:nvCxnSpPr>
-        <p:spPr>
-          <a:xfrm>
-            <a:off x="1792224" y="1645920"/>
-            <a:ext cx="329184" cy="0"/>
-          </a:xfrm>
-          <a:prstGeom prst="line">
-            <a:avLst/>
-          </a:prstGeom>
-          <a:ln w="21590">
-            <a:solidFill>
-              <a:srgbClr val="8EDBD4"/>
-            </a:solidFill>
-            <a:headEnd type="none" w="med" len="med"/>
-            <a:tailEnd type="triangle" w="med" len="med"/>
-          </a:ln>
-          <a:effectLst/>
-        </p:spPr>
-      </p:cxnSp>
-      <p:sp>
-        <p:nvSpPr>
-          <p:cNvPr id="6" name="text 4" descr="sci-ppt:obj-004"/>
+      <p:sp>
+        <p:nvSpPr>
+          <p:cNvPr id="6" name="A-E21 text 4" descr="sci-ppt:o004"/>
           <p:cNvSpPr txBox="1"/>
           <p:nvPr/>
         </p:nvSpPr>
         <p:spPr>
           <a:xfrm>
-            <a:off x="1755648" y="1271016"/>
-            <a:ext cx="1097280" cy="310896"/>
+            <a:off x="566928" y="2340864"/>
+            <a:ext cx="1929384" cy="247142"/>
           </a:xfrm>
           <a:prstGeom prst="rect">
             <a:avLst/>
@@ -3240,7 +3266,7 @@
           <a:effectLst/>
         </p:spPr>
         <p:txBody>
-          <a:bodyPr wrap="none" lIns="0" rIns="0" tIns="0" bIns="0" anchor="ctr">
+          <a:bodyPr wrap="none" lIns="18288" rIns="18288" tIns="18288" bIns="18288" anchor="t">
             <a:spAutoFit/>
           </a:bodyPr>
           <a:lstStyle/>
@@ -3251,51 +3277,99 @@
               </a:spcAft>
             </a:pPr>
             <a:r>
-              <a:rPr sz="1296" b="0" i="0">
+              <a:rPr sz="1300" b="1" i="0">
+                <a:solidFill>
+                  <a:srgbClr val="7FC8F8"/>
+                </a:solidFill>
+                <a:latin typeface="Arial"/>
+              </a:rPr>
+              <a:t>inertia</a:t>
+            </a:r>
+          </a:p>
+        </p:txBody>
+      </p:sp>
+      <p:sp>
+        <p:nvSpPr>
+          <p:cNvPr id="7" name="A-E21 text 5" descr="sci-ppt:o005"/>
+          <p:cNvSpPr txBox="1"/>
+          <p:nvPr/>
+        </p:nvSpPr>
+        <p:spPr>
+          <a:xfrm>
+            <a:off x="530352" y="2880360"/>
+            <a:ext cx="2011680" cy="223900"/>
+          </a:xfrm>
+          <a:prstGeom prst="rect">
+            <a:avLst/>
+          </a:prstGeom>
+          <a:noFill/>
+          <a:effectLst/>
+        </p:spPr>
+        <p:txBody>
+          <a:bodyPr wrap="none" lIns="18288" rIns="18288" tIns="18288" bIns="18288" anchor="t">
+            <a:spAutoFit/>
+          </a:bodyPr>
+          <a:lstStyle/>
+          <a:p>
+            <a:pPr algn="ctr">
+              <a:spcAft>
+                <a:spcPts val="0"/>
+              </a:spcAft>
+            </a:pPr>
+            <a:r>
+              <a:rPr sz="1150" b="1" i="0">
                 <a:solidFill>
                   <a:srgbClr val="E7F0F3"/>
                 </a:solidFill>
                 <a:latin typeface="Arial"/>
               </a:rPr>
-              <a:t>Rref</a:t>
-            </a:r>
-          </a:p>
-        </p:txBody>
-      </p:sp>
-      <p:cxnSp>
-        <p:nvCxnSpPr>
-          <p:cNvPr id="7" name="arrow 5" descr="sci-ppt:obj-005"/>
-          <p:cNvCxnSpPr/>
+              <a:t>ρ_g(RR̈ + 3Ṙ²/2)</a:t>
+            </a:r>
+          </a:p>
+        </p:txBody>
+      </p:sp>
+      <p:sp>
+        <p:nvSpPr>
+          <p:cNvPr id="8" name="A-E21 round_rect 6" descr="sci-ppt:o006"/>
+          <p:cNvSpPr/>
           <p:nvPr/>
-        </p:nvCxnSpPr>
-        <p:spPr>
-          <a:xfrm>
-            <a:off x="1792224" y="1645920"/>
-            <a:ext cx="517262" cy="517262"/>
-          </a:xfrm>
-          <a:prstGeom prst="line">
+        </p:nvSpPr>
+        <p:spPr>
+          <a:xfrm>
+            <a:off x="2743200" y="2286000"/>
+            <a:ext cx="2148840" cy="1554480"/>
+          </a:xfrm>
+          <a:prstGeom prst="roundRect">
             <a:avLst/>
           </a:prstGeom>
-          <a:ln w="21590">
+          <a:solidFill>
+            <a:srgbClr val="213E4B"/>
+          </a:solidFill>
+          <a:ln w="20320">
             <a:solidFill>
               <a:srgbClr val="8EDBD4"/>
             </a:solidFill>
-            <a:headEnd type="none" w="med" len="med"/>
-            <a:tailEnd type="triangle" w="med" len="med"/>
           </a:ln>
           <a:effectLst/>
         </p:spPr>
-      </p:cxnSp>
-      <p:sp>
-        <p:nvSpPr>
-          <p:cNvPr id="8" name="text 6" descr="sci-ppt:obj-006"/>
+        <p:txBody>
+          <a:bodyPr rtlCol="0" anchor="ctr"/>
+          <a:lstStyle/>
+          <a:p>
+            <a:pPr algn="ctr"/>
+          </a:p>
+        </p:txBody>
+      </p:sp>
+      <p:sp>
+        <p:nvSpPr>
+          <p:cNvPr id="9" name="A-E21 text 7" descr="sci-ppt:o007"/>
           <p:cNvSpPr txBox="1"/>
           <p:nvPr/>
         </p:nvSpPr>
         <p:spPr>
           <a:xfrm>
-            <a:off x="2304288" y="2139696"/>
-            <a:ext cx="822960" cy="310896"/>
+            <a:off x="2852928" y="2340864"/>
+            <a:ext cx="1929384" cy="247142"/>
           </a:xfrm>
           <a:prstGeom prst="rect">
             <a:avLst/>
@@ -3304,7 +3378,7 @@
           <a:effectLst/>
         </p:spPr>
         <p:txBody>
-          <a:bodyPr wrap="none" lIns="0" rIns="0" tIns="0" bIns="0" anchor="ctr">
+          <a:bodyPr wrap="none" lIns="18288" rIns="18288" tIns="18288" bIns="18288" anchor="t">
             <a:spAutoFit/>
           </a:bodyPr>
           <a:lstStyle/>
@@ -3315,67 +3389,77 @@
               </a:spcAft>
             </a:pPr>
             <a:r>
-              <a:rPr sz="1296" b="0" i="0">
+              <a:rPr sz="1300" b="1" i="0">
+                <a:solidFill>
+                  <a:srgbClr val="8EDBD4"/>
+                </a:solidFill>
+                <a:latin typeface="Arial"/>
+              </a:rPr>
+              <a:t>driving</a:t>
+            </a:r>
+          </a:p>
+        </p:txBody>
+      </p:sp>
+      <p:sp>
+        <p:nvSpPr>
+          <p:cNvPr id="10" name="A-E21 text 8" descr="sci-ppt:o008"/>
+          <p:cNvSpPr txBox="1"/>
+          <p:nvPr/>
+        </p:nvSpPr>
+        <p:spPr>
+          <a:xfrm>
+            <a:off x="2816352" y="2880360"/>
+            <a:ext cx="2011680" cy="223900"/>
+          </a:xfrm>
+          <a:prstGeom prst="rect">
+            <a:avLst/>
+          </a:prstGeom>
+          <a:noFill/>
+          <a:effectLst/>
+        </p:spPr>
+        <p:txBody>
+          <a:bodyPr wrap="none" lIns="18288" rIns="18288" tIns="18288" bIns="18288" anchor="t">
+            <a:spAutoFit/>
+          </a:bodyPr>
+          <a:lstStyle/>
+          <a:p>
+            <a:pPr algn="ctr">
+              <a:spcAft>
+                <a:spcPts val="0"/>
+              </a:spcAft>
+            </a:pPr>
+            <a:r>
+              <a:rPr sz="1150" b="1" i="0">
                 <a:solidFill>
                   <a:srgbClr val="E7F0F3"/>
                 </a:solidFill>
                 <a:latin typeface="Arial"/>
               </a:rPr>
-              <a:t>r₀</a:t>
-            </a:r>
-          </a:p>
-        </p:txBody>
-      </p:sp>
-      <p:sp>
-        <p:nvSpPr>
-          <p:cNvPr id="9" name="ellipse 7" descr="sci-ppt:obj-007"/>
+              <a:t>p_b − p_∞</a:t>
+            </a:r>
+          </a:p>
+        </p:txBody>
+      </p:sp>
+      <p:sp>
+        <p:nvSpPr>
+          <p:cNvPr id="11" name="A-E21 round_rect 9" descr="sci-ppt:o009"/>
           <p:cNvSpPr/>
           <p:nvPr/>
         </p:nvSpPr>
         <p:spPr>
           <a:xfrm>
-            <a:off x="4682139" y="750219"/>
-            <a:ext cx="1791401" cy="1791401"/>
-          </a:xfrm>
-          <a:prstGeom prst="ellipse">
-            <a:avLst/>
-          </a:prstGeom>
-          <a:noFill/>
-          <a:ln w="17780">
-            <a:solidFill>
-              <a:srgbClr val="B4C7D2"/>
-            </a:solidFill>
-          </a:ln>
-          <a:effectLst/>
-        </p:spPr>
-        <p:txBody>
-          <a:bodyPr rtlCol="0" anchor="ctr"/>
-          <a:lstStyle/>
-          <a:p>
-            <a:pPr algn="ctr"/>
-          </a:p>
-        </p:txBody>
-      </p:sp>
-      <p:sp>
-        <p:nvSpPr>
-          <p:cNvPr id="10" name="ellipse 8" descr="sci-ppt:obj-008"/>
-          <p:cNvSpPr/>
-          <p:nvPr/>
-        </p:nvSpPr>
-        <p:spPr>
-          <a:xfrm>
-            <a:off x="4864608" y="932688"/>
-            <a:ext cx="1426464" cy="1426464"/>
-          </a:xfrm>
-          <a:prstGeom prst="ellipse">
+            <a:off x="5029200" y="2286000"/>
+            <a:ext cx="2148840" cy="1554480"/>
+          </a:xfrm>
+          <a:prstGeom prst="roundRect">
             <a:avLst/>
           </a:prstGeom>
           <a:solidFill>
             <a:srgbClr val="213E4B"/>
           </a:solidFill>
-          <a:ln w="17780">
+          <a:ln w="20320">
             <a:solidFill>
-              <a:srgbClr val="B4C7D2"/>
+              <a:srgbClr val="F2B880"/>
             </a:solidFill>
           </a:ln>
           <a:effectLst/>
@@ -3388,40 +3472,16 @@
           </a:p>
         </p:txBody>
       </p:sp>
-      <p:cxnSp>
-        <p:nvCxnSpPr>
-          <p:cNvPr id="11" name="arrow 9" descr="sci-ppt:obj-009"/>
-          <p:cNvCxnSpPr/>
-          <p:nvPr/>
-        </p:nvCxnSpPr>
-        <p:spPr>
-          <a:xfrm>
-            <a:off x="5577840" y="1645920"/>
-            <a:ext cx="713232" cy="0"/>
-          </a:xfrm>
-          <a:prstGeom prst="line">
-            <a:avLst/>
-          </a:prstGeom>
-          <a:ln w="21590">
-            <a:solidFill>
-              <a:srgbClr val="8EDBD4"/>
-            </a:solidFill>
-            <a:headEnd type="none" w="med" len="med"/>
-            <a:tailEnd type="triangle" w="med" len="med"/>
-          </a:ln>
-          <a:effectLst/>
-        </p:spPr>
-      </p:cxnSp>
-      <p:sp>
-        <p:nvSpPr>
-          <p:cNvPr id="12" name="text 10" descr="sci-ppt:obj-010"/>
+      <p:sp>
+        <p:nvSpPr>
+          <p:cNvPr id="12" name="A-E21 text 10" descr="sci-ppt:o010"/>
           <p:cNvSpPr txBox="1"/>
           <p:nvPr/>
         </p:nvSpPr>
         <p:spPr>
           <a:xfrm>
-            <a:off x="5952744" y="1271016"/>
-            <a:ext cx="640080" cy="310896"/>
+            <a:off x="5138928" y="2340864"/>
+            <a:ext cx="1929384" cy="247142"/>
           </a:xfrm>
           <a:prstGeom prst="rect">
             <a:avLst/>
@@ -3430,7 +3490,7 @@
           <a:effectLst/>
         </p:spPr>
         <p:txBody>
-          <a:bodyPr wrap="none" lIns="0" rIns="0" tIns="0" bIns="0" anchor="ctr">
+          <a:bodyPr wrap="none" lIns="18288" rIns="18288" tIns="18288" bIns="18288" anchor="t">
             <a:spAutoFit/>
           </a:bodyPr>
           <a:lstStyle/>
@@ -3441,51 +3501,99 @@
               </a:spcAft>
             </a:pPr>
             <a:r>
-              <a:rPr sz="1296" b="0" i="0">
+              <a:rPr sz="1300" b="1" i="0">
+                <a:solidFill>
+                  <a:srgbClr val="F2B880"/>
+                </a:solidFill>
+                <a:latin typeface="Arial"/>
+              </a:rPr>
+              <a:t>capillary</a:t>
+            </a:r>
+          </a:p>
+        </p:txBody>
+      </p:sp>
+      <p:sp>
+        <p:nvSpPr>
+          <p:cNvPr id="13" name="A-E21 text 11" descr="sci-ppt:o011"/>
+          <p:cNvSpPr txBox="1"/>
+          <p:nvPr/>
+        </p:nvSpPr>
+        <p:spPr>
+          <a:xfrm>
+            <a:off x="5102352" y="2880360"/>
+            <a:ext cx="2011680" cy="223900"/>
+          </a:xfrm>
+          <a:prstGeom prst="rect">
+            <a:avLst/>
+          </a:prstGeom>
+          <a:noFill/>
+          <a:effectLst/>
+        </p:spPr>
+        <p:txBody>
+          <a:bodyPr wrap="none" lIns="18288" rIns="18288" tIns="18288" bIns="18288" anchor="t">
+            <a:spAutoFit/>
+          </a:bodyPr>
+          <a:lstStyle/>
+          <a:p>
+            <a:pPr algn="ctr">
+              <a:spcAft>
+                <a:spcPts val="0"/>
+              </a:spcAft>
+            </a:pPr>
+            <a:r>
+              <a:rPr sz="1150" b="1" i="0">
                 <a:solidFill>
                   <a:srgbClr val="E7F0F3"/>
                 </a:solidFill>
                 <a:latin typeface="Arial"/>
               </a:rPr>
-              <a:t>R</a:t>
-            </a:r>
-          </a:p>
-        </p:txBody>
-      </p:sp>
-      <p:cxnSp>
-        <p:nvCxnSpPr>
-          <p:cNvPr id="13" name="arrow 11" descr="sci-ppt:obj-011"/>
-          <p:cNvCxnSpPr/>
+              <a:t>2σ/R</a:t>
+            </a:r>
+          </a:p>
+        </p:txBody>
+      </p:sp>
+      <p:sp>
+        <p:nvSpPr>
+          <p:cNvPr id="14" name="A-E21 round_rect 12" descr="sci-ppt:o012"/>
+          <p:cNvSpPr/>
           <p:nvPr/>
-        </p:nvCxnSpPr>
-        <p:spPr>
-          <a:xfrm>
-            <a:off x="5577840" y="1645920"/>
-            <a:ext cx="633355" cy="633355"/>
-          </a:xfrm>
-          <a:prstGeom prst="line">
+        </p:nvSpPr>
+        <p:spPr>
+          <a:xfrm>
+            <a:off x="7315200" y="2286000"/>
+            <a:ext cx="2148840" cy="1554480"/>
+          </a:xfrm>
+          <a:prstGeom prst="roundRect">
             <a:avLst/>
           </a:prstGeom>
-          <a:ln w="21590">
+          <a:solidFill>
+            <a:srgbClr val="213E4B"/>
+          </a:solidFill>
+          <a:ln w="20320">
             <a:solidFill>
-              <a:srgbClr val="8EDBD4"/>
+              <a:srgbClr val="F28BA0"/>
             </a:solidFill>
-            <a:headEnd type="none" w="med" len="med"/>
-            <a:tailEnd type="triangle" w="med" len="med"/>
           </a:ln>
           <a:effectLst/>
         </p:spPr>
-      </p:cxnSp>
-      <p:sp>
-        <p:nvSpPr>
-          <p:cNvPr id="14" name="text 12" descr="sci-ppt:obj-012"/>
+        <p:txBody>
+          <a:bodyPr rtlCol="0" anchor="ctr"/>
+          <a:lstStyle/>
+          <a:p>
+            <a:pPr algn="ctr"/>
+          </a:p>
+        </p:txBody>
+      </p:sp>
+      <p:sp>
+        <p:nvSpPr>
+          <p:cNvPr id="15" name="A-E21 text 13" descr="sci-ppt:o013"/>
           <p:cNvSpPr txBox="1"/>
           <p:nvPr/>
         </p:nvSpPr>
         <p:spPr>
           <a:xfrm>
-            <a:off x="6373368" y="2231136"/>
-            <a:ext cx="640080" cy="310896"/>
+            <a:off x="7424927" y="2340864"/>
+            <a:ext cx="1929384" cy="247142"/>
           </a:xfrm>
           <a:prstGeom prst="rect">
             <a:avLst/>
@@ -3494,7 +3602,7 @@
           <a:effectLst/>
         </p:spPr>
         <p:txBody>
-          <a:bodyPr wrap="none" lIns="0" rIns="0" tIns="0" bIns="0" anchor="ctr">
+          <a:bodyPr wrap="none" lIns="18288" rIns="18288" tIns="18288" bIns="18288" anchor="t">
             <a:spAutoFit/>
           </a:bodyPr>
           <a:lstStyle/>
@@ -3505,51 +3613,99 @@
               </a:spcAft>
             </a:pPr>
             <a:r>
-              <a:rPr sz="1296" b="0" i="0">
+              <a:rPr sz="1300" b="1" i="0">
+                <a:solidFill>
+                  <a:srgbClr val="F28BA0"/>
+                </a:solidFill>
+                <a:latin typeface="Arial"/>
+              </a:rPr>
+              <a:t>elastic</a:t>
+            </a:r>
+          </a:p>
+        </p:txBody>
+      </p:sp>
+      <p:sp>
+        <p:nvSpPr>
+          <p:cNvPr id="16" name="A-E21 text 14" descr="sci-ppt:o014"/>
+          <p:cNvSpPr txBox="1"/>
+          <p:nvPr/>
+        </p:nvSpPr>
+        <p:spPr>
+          <a:xfrm>
+            <a:off x="7388352" y="2880360"/>
+            <a:ext cx="2011680" cy="223900"/>
+          </a:xfrm>
+          <a:prstGeom prst="rect">
+            <a:avLst/>
+          </a:prstGeom>
+          <a:noFill/>
+          <a:effectLst/>
+        </p:spPr>
+        <p:txBody>
+          <a:bodyPr wrap="none" lIns="18288" rIns="18288" tIns="18288" bIns="18288" anchor="t">
+            <a:spAutoFit/>
+          </a:bodyPr>
+          <a:lstStyle/>
+          <a:p>
+            <a:pPr algn="ctr">
+              <a:spcAft>
+                <a:spcPts val="0"/>
+              </a:spcAft>
+            </a:pPr>
+            <a:r>
+              <a:rPr sz="1150" b="1" i="0">
                 <a:solidFill>
                   <a:srgbClr val="E7F0F3"/>
                 </a:solidFill>
                 <a:latin typeface="Arial"/>
               </a:rPr>
-              <a:t>r</a:t>
-            </a:r>
-          </a:p>
-        </p:txBody>
-      </p:sp>
-      <p:cxnSp>
-        <p:nvCxnSpPr>
-          <p:cNvPr id="15" name="arrow 13" descr="sci-ppt:obj-013"/>
-          <p:cNvCxnSpPr/>
+              <a:t>pₑₗ(R)</a:t>
+            </a:r>
+          </a:p>
+        </p:txBody>
+      </p:sp>
+      <p:sp>
+        <p:nvSpPr>
+          <p:cNvPr id="17" name="A-E21 round_rect 15" descr="sci-ppt:o015"/>
+          <p:cNvSpPr/>
           <p:nvPr/>
-        </p:nvCxnSpPr>
-        <p:spPr>
-          <a:xfrm>
-            <a:off x="2697480" y="1645920"/>
-            <a:ext cx="1691640" cy="0"/>
-          </a:xfrm>
-          <a:prstGeom prst="line">
+        </p:nvSpPr>
+        <p:spPr>
+          <a:xfrm>
+            <a:off x="9601200" y="2286000"/>
+            <a:ext cx="2148840" cy="1554480"/>
+          </a:xfrm>
+          <a:prstGeom prst="roundRect">
             <a:avLst/>
           </a:prstGeom>
-          <a:ln w="21590">
+          <a:solidFill>
+            <a:srgbClr val="213E4B"/>
+          </a:solidFill>
+          <a:ln w="20320">
             <a:solidFill>
-              <a:srgbClr val="8EDBD4"/>
+              <a:srgbClr val="A8E6A1"/>
             </a:solidFill>
-            <a:headEnd type="none" w="med" len="med"/>
-            <a:tailEnd type="triangle" w="med" len="med"/>
           </a:ln>
           <a:effectLst/>
         </p:spPr>
-      </p:cxnSp>
-      <p:sp>
-        <p:nvSpPr>
-          <p:cNvPr id="16" name="text 14" descr="sci-ppt:obj-014"/>
+        <p:txBody>
+          <a:bodyPr rtlCol="0" anchor="ctr"/>
+          <a:lstStyle/>
+          <a:p>
+            <a:pPr algn="ctr"/>
+          </a:p>
+        </p:txBody>
+      </p:sp>
+      <p:sp>
+        <p:nvSpPr>
+          <p:cNvPr id="18" name="A-E21 text 16" descr="sci-ppt:o016"/>
           <p:cNvSpPr txBox="1"/>
           <p:nvPr/>
         </p:nvSpPr>
         <p:spPr>
           <a:xfrm>
-            <a:off x="2834640" y="1143000"/>
-            <a:ext cx="2286000" cy="310896"/>
+            <a:off x="9710928" y="2340864"/>
+            <a:ext cx="1929384" cy="247142"/>
           </a:xfrm>
           <a:prstGeom prst="rect">
             <a:avLst/>
@@ -3558,7 +3714,7 @@
           <a:effectLst/>
         </p:spPr>
         <p:txBody>
-          <a:bodyPr wrap="none" lIns="0" rIns="0" tIns="0" bIns="0" anchor="ctr">
+          <a:bodyPr wrap="none" lIns="18288" rIns="18288" tIns="18288" bIns="18288" anchor="t">
             <a:spAutoFit/>
           </a:bodyPr>
           <a:lstStyle/>
@@ -3569,27 +3725,99 @@
               </a:spcAft>
             </a:pPr>
             <a:r>
-              <a:rPr sz="1296" b="0" i="0">
+              <a:rPr sz="1300" b="1" i="0">
+                <a:solidFill>
+                  <a:srgbClr val="A8E6A1"/>
+                </a:solidFill>
+                <a:latin typeface="Arial"/>
+              </a:rPr>
+              <a:t>viscous</a:t>
+            </a:r>
+          </a:p>
+        </p:txBody>
+      </p:sp>
+      <p:sp>
+        <p:nvSpPr>
+          <p:cNvPr id="19" name="A-E21 text 17" descr="sci-ppt:o017"/>
+          <p:cNvSpPr txBox="1"/>
+          <p:nvPr/>
+        </p:nvSpPr>
+        <p:spPr>
+          <a:xfrm>
+            <a:off x="9674352" y="2880360"/>
+            <a:ext cx="2011680" cy="223900"/>
+          </a:xfrm>
+          <a:prstGeom prst="rect">
+            <a:avLst/>
+          </a:prstGeom>
+          <a:noFill/>
+          <a:effectLst/>
+        </p:spPr>
+        <p:txBody>
+          <a:bodyPr wrap="none" lIns="18288" rIns="18288" tIns="18288" bIns="18288" anchor="t">
+            <a:spAutoFit/>
+          </a:bodyPr>
+          <a:lstStyle/>
+          <a:p>
+            <a:pPr algn="ctr">
+              <a:spcAft>
+                <a:spcPts val="0"/>
+              </a:spcAft>
+            </a:pPr>
+            <a:r>
+              <a:rPr sz="1150" b="1" i="0">
                 <a:solidFill>
                   <a:srgbClr val="E7F0F3"/>
                 </a:solidFill>
                 <a:latin typeface="Arial"/>
               </a:rPr>
-              <a:t>Material map</a:t>
-            </a:r>
-          </a:p>
-        </p:txBody>
-      </p:sp>
-      <p:sp>
-        <p:nvSpPr>
-          <p:cNvPr id="17" name="text 15" descr="sci-ppt:obj-015"/>
+              <a:t>4η_gṘ/R</a:t>
+            </a:r>
+          </a:p>
+        </p:txBody>
+      </p:sp>
+      <p:sp>
+        <p:nvSpPr>
+          <p:cNvPr id="20" name="A-E21 round_rect 18" descr="sci-ppt:o018"/>
+          <p:cNvSpPr/>
+          <p:nvPr/>
+        </p:nvSpPr>
+        <p:spPr>
+          <a:xfrm>
+            <a:off x="457200" y="4114800"/>
+            <a:ext cx="5486400" cy="1600200"/>
+          </a:xfrm>
+          <a:prstGeom prst="roundRect">
+            <a:avLst/>
+          </a:prstGeom>
+          <a:solidFill>
+            <a:srgbClr val="213E4B"/>
+          </a:solidFill>
+          <a:ln w="20320">
+            <a:solidFill>
+              <a:srgbClr val="8EDBD4"/>
+            </a:solidFill>
+          </a:ln>
+          <a:effectLst/>
+        </p:spPr>
+        <p:txBody>
+          <a:bodyPr rtlCol="0" anchor="ctr"/>
+          <a:lstStyle/>
+          <a:p>
+            <a:pPr algn="ctr"/>
+          </a:p>
+        </p:txBody>
+      </p:sp>
+      <p:sp>
+        <p:nvSpPr>
+          <p:cNvPr id="21" name="A-E21 text 19" descr="sci-ppt:o019"/>
           <p:cNvSpPr txBox="1"/>
           <p:nvPr/>
         </p:nvSpPr>
         <p:spPr>
           <a:xfrm>
-            <a:off x="1005840" y="2578608"/>
-            <a:ext cx="2286000" cy="310896"/>
+            <a:off x="566928" y="4169663"/>
+            <a:ext cx="5266944" cy="247142"/>
           </a:xfrm>
           <a:prstGeom prst="rect">
             <a:avLst/>
@@ -3598,7 +3826,7 @@
           <a:effectLst/>
         </p:spPr>
         <p:txBody>
-          <a:bodyPr wrap="none" lIns="0" rIns="0" tIns="0" bIns="0" anchor="ctr">
+          <a:bodyPr wrap="none" lIns="18288" rIns="18288" tIns="18288" bIns="18288" anchor="t">
             <a:spAutoFit/>
           </a:bodyPr>
           <a:lstStyle/>
@@ -3609,27 +3837,115 @@
               </a:spcAft>
             </a:pPr>
             <a:r>
-              <a:rPr sz="1296" b="0" i="0">
+              <a:rPr sz="1300" b="1" i="0">
+                <a:solidFill>
+                  <a:srgbClr val="8EDBD4"/>
+                </a:solidFill>
+                <a:latin typeface="Arial"/>
+              </a:rPr>
+              <a:t>What it describes</a:t>
+            </a:r>
+          </a:p>
+        </p:txBody>
+      </p:sp>
+      <p:sp>
+        <p:nvSpPr>
+          <p:cNvPr id="22" name="A-E21 text 20" descr="sci-ppt:o020"/>
+          <p:cNvSpPr txBox="1"/>
+          <p:nvPr/>
+        </p:nvSpPr>
+        <p:spPr>
+          <a:xfrm>
+            <a:off x="594360" y="4572000"/>
+            <a:ext cx="5212080" cy="417576"/>
+          </a:xfrm>
+          <a:prstGeom prst="rect">
+            <a:avLst/>
+          </a:prstGeom>
+          <a:noFill/>
+          <a:effectLst/>
+        </p:spPr>
+        <p:txBody>
+          <a:bodyPr wrap="none" lIns="18288" rIns="18288" tIns="18288" bIns="18288" anchor="t">
+            <a:spAutoFit/>
+          </a:bodyPr>
+          <a:lstStyle/>
+          <a:p>
+            <a:pPr algn="l">
+              <a:spcAft>
+                <a:spcPts val="0"/>
+              </a:spcAft>
+            </a:pPr>
+            <a:r>
+              <a:rPr sz="1200" b="0" i="0">
                 <a:solidFill>
                   <a:srgbClr val="E7F0F3"/>
                 </a:solidFill>
                 <a:latin typeface="Arial"/>
               </a:rPr>
-              <a:t>Reference</a:t>
-            </a:r>
-          </a:p>
-        </p:txBody>
-      </p:sp>
-      <p:sp>
-        <p:nvSpPr>
-          <p:cNvPr id="18" name="text 16" descr="sci-ppt:obj-016"/>
+              <a:t>Spherical expansion of a cavity and the resistance of the gel to</a:t>
+            </a:r>
+          </a:p>
+          <a:p>
+            <a:pPr algn="l">
+              <a:spcAft>
+                <a:spcPts val="0"/>
+              </a:spcAft>
+            </a:pPr>
+            <a:r>
+              <a:rPr sz="1200" b="0" i="0">
+                <a:solidFill>
+                  <a:srgbClr val="E7F0F3"/>
+                </a:solidFill>
+                <a:latin typeface="Arial"/>
+              </a:rPr>
+              <a:t>it.</a:t>
+            </a:r>
+          </a:p>
+        </p:txBody>
+      </p:sp>
+      <p:sp>
+        <p:nvSpPr>
+          <p:cNvPr id="23" name="A-E21 round_rect 21" descr="sci-ppt:o021"/>
+          <p:cNvSpPr/>
+          <p:nvPr/>
+        </p:nvSpPr>
+        <p:spPr>
+          <a:xfrm>
+            <a:off x="6217920" y="4114800"/>
+            <a:ext cx="5486400" cy="1600200"/>
+          </a:xfrm>
+          <a:prstGeom prst="roundRect">
+            <a:avLst/>
+          </a:prstGeom>
+          <a:solidFill>
+            <a:srgbClr val="213E4B"/>
+          </a:solidFill>
+          <a:ln w="20320">
+            <a:solidFill>
+              <a:srgbClr val="F28BA0"/>
+            </a:solidFill>
+          </a:ln>
+          <a:effectLst/>
+        </p:spPr>
+        <p:txBody>
+          <a:bodyPr rtlCol="0" anchor="ctr"/>
+          <a:lstStyle/>
+          <a:p>
+            <a:pPr algn="ctr"/>
+          </a:p>
+        </p:txBody>
+      </p:sp>
+      <p:sp>
+        <p:nvSpPr>
+          <p:cNvPr id="24" name="A-E21 text 22" descr="sci-ppt:o022"/>
           <p:cNvSpPr txBox="1"/>
           <p:nvPr/>
         </p:nvSpPr>
         <p:spPr>
           <a:xfrm>
-            <a:off x="4846320" y="2660904"/>
-            <a:ext cx="3383280" cy="310896"/>
+            <a:off x="6327648" y="4169663"/>
+            <a:ext cx="5266944" cy="247142"/>
           </a:xfrm>
           <a:prstGeom prst="rect">
             <a:avLst/>
@@ -3638,7 +3954,7 @@
           <a:effectLst/>
         </p:spPr>
         <p:txBody>
-          <a:bodyPr wrap="none" lIns="0" rIns="0" tIns="0" bIns="0" anchor="ctr">
+          <a:bodyPr wrap="none" lIns="18288" rIns="18288" tIns="18288" bIns="18288" anchor="t">
             <a:spAutoFit/>
           </a:bodyPr>
           <a:lstStyle/>
@@ -3649,27 +3965,83 @@
               </a:spcAft>
             </a:pPr>
             <a:r>
-              <a:rPr sz="1296" b="0" i="0">
+              <a:rPr sz="1300" b="1" i="0">
+                <a:solidFill>
+                  <a:srgbClr val="F28BA0"/>
+                </a:solidFill>
+                <a:latin typeface="Arial"/>
+              </a:rPr>
+              <a:t>What it cannot do</a:t>
+            </a:r>
+          </a:p>
+        </p:txBody>
+      </p:sp>
+      <p:sp>
+        <p:nvSpPr>
+          <p:cNvPr id="25" name="A-E21 text 23" descr="sci-ppt:o023"/>
+          <p:cNvSpPr txBox="1"/>
+          <p:nvPr/>
+        </p:nvSpPr>
+        <p:spPr>
+          <a:xfrm>
+            <a:off x="6355080" y="4572000"/>
+            <a:ext cx="5212080" cy="417576"/>
+          </a:xfrm>
+          <a:prstGeom prst="rect">
+            <a:avLst/>
+          </a:prstGeom>
+          <a:noFill/>
+          <a:effectLst/>
+        </p:spPr>
+        <p:txBody>
+          <a:bodyPr wrap="none" lIns="18288" rIns="18288" tIns="18288" bIns="18288" anchor="t">
+            <a:spAutoFit/>
+          </a:bodyPr>
+          <a:lstStyle/>
+          <a:p>
+            <a:pPr algn="l">
+              <a:spcAft>
+                <a:spcPts val="0"/>
+              </a:spcAft>
+            </a:pPr>
+            <a:r>
+              <a:rPr sz="1200" b="0" i="0">
                 <a:solidFill>
                   <a:srgbClr val="E7F0F3"/>
                 </a:solidFill>
                 <a:latin typeface="Arial"/>
               </a:rPr>
-              <a:t>Deformed: λr , λθ</a:t>
-            </a:r>
-          </a:p>
-        </p:txBody>
-      </p:sp>
-      <p:sp>
-        <p:nvSpPr>
-          <p:cNvPr id="19" name="text 17" descr="sci-ppt:obj-017"/>
+              <a:t>It does not manufacture an outlet: no hole, no jet exit, no</a:t>
+            </a:r>
+          </a:p>
+          <a:p>
+            <a:pPr algn="l">
+              <a:spcAft>
+                <a:spcPts val="0"/>
+              </a:spcAft>
+            </a:pPr>
+            <a:r>
+              <a:rPr sz="1200" b="0" i="0">
+                <a:solidFill>
+                  <a:srgbClr val="E7F0F3"/>
+                </a:solidFill>
+                <a:latin typeface="Arial"/>
+              </a:rPr>
+              <a:t>directional flow.</a:t>
+            </a:r>
+          </a:p>
+        </p:txBody>
+      </p:sp>
+      <p:sp>
+        <p:nvSpPr>
+          <p:cNvPr id="26" name="A-E21 text 24" descr="sci-ppt:o024"/>
           <p:cNvSpPr txBox="1"/>
           <p:nvPr/>
         </p:nvSpPr>
         <p:spPr>
           <a:xfrm>
-            <a:off x="6839712" y="777240"/>
-            <a:ext cx="1645920" cy="310896"/>
+            <a:off x="320040" y="6510528"/>
+            <a:ext cx="11521440" cy="200660"/>
           </a:xfrm>
           <a:prstGeom prst="rect">
             <a:avLst/>
@@ -3678,7 +4050,7 @@
           <a:effectLst/>
         </p:spPr>
         <p:txBody>
-          <a:bodyPr wrap="none" lIns="0" rIns="0" tIns="0" bIns="0" anchor="ctr">
+          <a:bodyPr wrap="none" lIns="18288" rIns="18288" tIns="18288" bIns="18288" anchor="t">
             <a:spAutoFit/>
           </a:bodyPr>
           <a:lstStyle/>
@@ -3689,413 +4061,13 @@
               </a:spcAft>
             </a:pPr>
             <a:r>
-              <a:rPr sz="1296" b="0" i="0">
+              <a:rPr sz="1000" b="0" i="0">
                 <a:solidFill>
-                  <a:srgbClr val="E7F0F3"/>
+                  <a:srgbClr val="B4C7D2"/>
                 </a:solidFill>
                 <a:latin typeface="Arial"/>
               </a:rPr>
-              <a:t>Gg , ηg</a:t>
-            </a:r>
-          </a:p>
-        </p:txBody>
-      </p:sp>
-      <p:sp>
-        <p:nvSpPr>
-          <p:cNvPr id="20" name="text 18" descr="sci-ppt:obj-018"/>
-          <p:cNvSpPr txBox="1"/>
-          <p:nvPr/>
-        </p:nvSpPr>
-        <p:spPr>
-          <a:xfrm>
-            <a:off x="6839712" y="1207008"/>
-            <a:ext cx="1828800" cy="310896"/>
-          </a:xfrm>
-          <a:prstGeom prst="rect">
-            <a:avLst/>
-          </a:prstGeom>
-          <a:noFill/>
-          <a:effectLst/>
-        </p:spPr>
-        <p:txBody>
-          <a:bodyPr wrap="none" lIns="0" rIns="0" tIns="0" bIns="0" anchor="ctr">
-            <a:spAutoFit/>
-          </a:bodyPr>
-          <a:lstStyle/>
-          <a:p>
-            <a:pPr algn="l">
-              <a:spcAft>
-                <a:spcPts val="0"/>
-              </a:spcAft>
-            </a:pPr>
-            <a:r>
-              <a:rPr sz="1296" b="0" i="0">
-                <a:solidFill>
-                  <a:srgbClr val="E7F0F3"/>
-                </a:solidFill>
-                <a:latin typeface="Arial"/>
-              </a:rPr>
-              <a:t>σrr , σθθ</a:t>
-            </a:r>
-          </a:p>
-        </p:txBody>
-      </p:sp>
-      <p:sp>
-        <p:nvSpPr>
-          <p:cNvPr id="21" name="text 19" descr="sci-ppt:obj-019"/>
-          <p:cNvSpPr txBox="1"/>
-          <p:nvPr/>
-        </p:nvSpPr>
-        <p:spPr>
-          <a:xfrm>
-            <a:off x="6839712" y="1645920"/>
-            <a:ext cx="1371600" cy="310896"/>
-          </a:xfrm>
-          <a:prstGeom prst="rect">
-            <a:avLst/>
-          </a:prstGeom>
-          <a:noFill/>
-          <a:effectLst/>
-        </p:spPr>
-        <p:txBody>
-          <a:bodyPr wrap="none" lIns="0" rIns="0" tIns="0" bIns="0" anchor="ctr">
-            <a:spAutoFit/>
-          </a:bodyPr>
-          <a:lstStyle/>
-          <a:p>
-            <a:pPr algn="l">
-              <a:spcAft>
-                <a:spcPts val="0"/>
-              </a:spcAft>
-            </a:pPr>
-            <a:r>
-              <a:rPr sz="1296" b="0" i="0">
-                <a:solidFill>
-                  <a:srgbClr val="E7F0F3"/>
-                </a:solidFill>
-                <a:latin typeface="Arial"/>
-              </a:rPr>
-              <a:t>p∞</a:t>
-            </a:r>
-          </a:p>
-        </p:txBody>
-      </p:sp>
-      <p:sp>
-        <p:nvSpPr>
-          <p:cNvPr id="22" name="text 20" descr="sci-ppt:obj-020"/>
-          <p:cNvSpPr txBox="1"/>
-          <p:nvPr/>
-        </p:nvSpPr>
-        <p:spPr>
-          <a:xfrm>
-            <a:off x="5266944" y="1682496"/>
-            <a:ext cx="822960" cy="310896"/>
-          </a:xfrm>
-          <a:prstGeom prst="rect">
-            <a:avLst/>
-          </a:prstGeom>
-          <a:noFill/>
-          <a:effectLst/>
-        </p:spPr>
-        <p:txBody>
-          <a:bodyPr wrap="none" lIns="0" rIns="0" tIns="0" bIns="0" anchor="ctr">
-            <a:spAutoFit/>
-          </a:bodyPr>
-          <a:lstStyle/>
-          <a:p>
-            <a:pPr algn="l">
-              <a:spcAft>
-                <a:spcPts val="0"/>
-              </a:spcAft>
-            </a:pPr>
-            <a:r>
-              <a:rPr sz="1296" b="0" i="0">
-                <a:solidFill>
-                  <a:srgbClr val="E7F0F3"/>
-                </a:solidFill>
-                <a:latin typeface="Arial"/>
-              </a:rPr>
-              <a:t>pb</a:t>
-            </a:r>
-          </a:p>
-        </p:txBody>
-      </p:sp>
-      <p:sp>
-        <p:nvSpPr>
-          <p:cNvPr id="23" name="text 21" descr="sci-ppt:obj-021"/>
-          <p:cNvSpPr txBox="1"/>
-          <p:nvPr/>
-        </p:nvSpPr>
-        <p:spPr>
-          <a:xfrm>
-            <a:off x="868680" y="2990088"/>
-            <a:ext cx="7772400" cy="310896"/>
-          </a:xfrm>
-          <a:prstGeom prst="rect">
-            <a:avLst/>
-          </a:prstGeom>
-          <a:noFill/>
-          <a:effectLst/>
-        </p:spPr>
-        <p:txBody>
-          <a:bodyPr wrap="none" lIns="0" rIns="0" tIns="0" bIns="0" anchor="ctr">
-            <a:spAutoFit/>
-          </a:bodyPr>
-          <a:lstStyle/>
-          <a:p>
-            <a:pPr algn="l">
-              <a:spcAft>
-                <a:spcPts val="0"/>
-              </a:spcAft>
-            </a:pPr>
-            <a:r>
-              <a:rPr sz="1152" b="0" i="0">
-                <a:solidFill>
-                  <a:srgbClr val="E7F0F3"/>
-                </a:solidFill>
-                <a:latin typeface="Arial"/>
-              </a:rPr>
-              <a:t>r₀³ − Rref³ = r³ − R³ ; radial coordinates point outward</a:t>
-            </a:r>
-          </a:p>
-        </p:txBody>
-      </p:sp>
-      <p:sp>
-        <p:nvSpPr>
-          <p:cNvPr id="24" name="text 22" descr="sci-ppt:obj-022"/>
-          <p:cNvSpPr txBox="1"/>
-          <p:nvPr/>
-        </p:nvSpPr>
-        <p:spPr>
-          <a:xfrm>
-            <a:off x="256032" y="3465576"/>
-            <a:ext cx="7315200" cy="310896"/>
-          </a:xfrm>
-          <a:prstGeom prst="rect">
-            <a:avLst/>
-          </a:prstGeom>
-          <a:noFill/>
-          <a:effectLst/>
-        </p:spPr>
-        <p:txBody>
-          <a:bodyPr wrap="none" lIns="0" rIns="0" tIns="0" bIns="0" anchor="ctr">
-            <a:spAutoFit/>
-          </a:bodyPr>
-          <a:lstStyle/>
-          <a:p>
-            <a:pPr algn="l">
-              <a:spcAft>
-                <a:spcPts val="0"/>
-              </a:spcAft>
-            </a:pPr>
-            <a:r>
-              <a:rPr sz="1296" b="0" i="0">
-                <a:solidFill>
-                  <a:srgbClr val="8EDBD4"/>
-                </a:solidFill>
-                <a:latin typeface="Arial"/>
-              </a:rPr>
-              <a:t>Variables and physical limits</a:t>
-            </a:r>
-          </a:p>
-        </p:txBody>
-      </p:sp>
-      <p:sp>
-        <p:nvSpPr>
-          <p:cNvPr id="25" name="text 23" descr="sci-ppt:obj-023"/>
-          <p:cNvSpPr txBox="1"/>
-          <p:nvPr/>
-        </p:nvSpPr>
-        <p:spPr>
-          <a:xfrm>
-            <a:off x="365760" y="3813048"/>
-            <a:ext cx="8412480" cy="310896"/>
-          </a:xfrm>
-          <a:prstGeom prst="rect">
-            <a:avLst/>
-          </a:prstGeom>
-          <a:noFill/>
-          <a:effectLst/>
-        </p:spPr>
-        <p:txBody>
-          <a:bodyPr wrap="none" lIns="0" rIns="0" tIns="0" bIns="0" anchor="ctr">
-            <a:spAutoFit/>
-          </a:bodyPr>
-          <a:lstStyle/>
-          <a:p>
-            <a:pPr algn="l">
-              <a:spcAft>
-                <a:spcPts val="0"/>
-              </a:spcAft>
-            </a:pPr>
-            <a:r>
-              <a:rPr sz="1152" b="0" i="0">
-                <a:solidFill>
-                  <a:srgbClr val="E7F0F3"/>
-                </a:solidFill>
-                <a:latin typeface="Arial"/>
-              </a:rPr>
-              <a:t>• pb → radial cavity motion</a:t>
-            </a:r>
-          </a:p>
-        </p:txBody>
-      </p:sp>
-      <p:sp>
-        <p:nvSpPr>
-          <p:cNvPr id="26" name="text 24" descr="sci-ppt:obj-024"/>
-          <p:cNvSpPr txBox="1"/>
-          <p:nvPr/>
-        </p:nvSpPr>
-        <p:spPr>
-          <a:xfrm>
-            <a:off x="365760" y="4023360"/>
-            <a:ext cx="8412480" cy="310896"/>
-          </a:xfrm>
-          <a:prstGeom prst="rect">
-            <a:avLst/>
-          </a:prstGeom>
-          <a:noFill/>
-          <a:effectLst/>
-        </p:spPr>
-        <p:txBody>
-          <a:bodyPr wrap="none" lIns="0" rIns="0" tIns="0" bIns="0" anchor="ctr">
-            <a:spAutoFit/>
-          </a:bodyPr>
-          <a:lstStyle/>
-          <a:p>
-            <a:pPr algn="l">
-              <a:spcAft>
-                <a:spcPts val="0"/>
-              </a:spcAft>
-            </a:pPr>
-            <a:r>
-              <a:rPr sz="1152" b="0" i="0">
-                <a:solidFill>
-                  <a:srgbClr val="E7F0F3"/>
-                </a:solidFill>
-                <a:latin typeface="Arial"/>
-              </a:rPr>
-              <a:t>• R, Ṙ, R̈, ρg</a:t>
-            </a:r>
-          </a:p>
-        </p:txBody>
-      </p:sp>
-      <p:sp>
-        <p:nvSpPr>
-          <p:cNvPr id="27" name="text 25" descr="sci-ppt:obj-025"/>
-          <p:cNvSpPr txBox="1"/>
-          <p:nvPr/>
-        </p:nvSpPr>
-        <p:spPr>
-          <a:xfrm>
-            <a:off x="365760" y="4233672"/>
-            <a:ext cx="8412480" cy="310896"/>
-          </a:xfrm>
-          <a:prstGeom prst="rect">
-            <a:avLst/>
-          </a:prstGeom>
-          <a:noFill/>
-          <a:effectLst/>
-        </p:spPr>
-        <p:txBody>
-          <a:bodyPr wrap="none" lIns="0" rIns="0" tIns="0" bIns="0" anchor="ctr">
-            <a:spAutoFit/>
-          </a:bodyPr>
-          <a:lstStyle/>
-          <a:p>
-            <a:pPr algn="l">
-              <a:spcAft>
-                <a:spcPts val="0"/>
-              </a:spcAft>
-            </a:pPr>
-            <a:r>
-              <a:rPr sz="1152" b="0" i="0">
-                <a:solidFill>
-                  <a:srgbClr val="E7F0F3"/>
-                </a:solidFill>
-                <a:latin typeface="Arial"/>
-              </a:rPr>
-              <a:t>• p∞, 2σ/R, pel, ηg</a:t>
-            </a:r>
-          </a:p>
-        </p:txBody>
-      </p:sp>
-      <p:sp>
-        <p:nvSpPr>
-          <p:cNvPr id="28" name="text 26" descr="sci-ppt:obj-026"/>
-          <p:cNvSpPr txBox="1"/>
-          <p:nvPr/>
-        </p:nvSpPr>
-        <p:spPr>
-          <a:xfrm>
-            <a:off x="365760" y="4443984"/>
-            <a:ext cx="8412480" cy="310896"/>
-          </a:xfrm>
-          <a:prstGeom prst="rect">
-            <a:avLst/>
-          </a:prstGeom>
-          <a:noFill/>
-          <a:effectLst/>
-        </p:spPr>
-        <p:txBody>
-          <a:bodyPr wrap="none" lIns="0" rIns="0" tIns="0" bIns="0" anchor="ctr">
-            <a:spAutoFit/>
-          </a:bodyPr>
-          <a:lstStyle/>
-          <a:p>
-            <a:pPr algn="l">
-              <a:spcAft>
-                <a:spcPts val="0"/>
-              </a:spcAft>
-            </a:pPr>
-            <a:r>
-              <a:rPr sz="1152" b="0" i="0">
-                <a:solidFill>
-                  <a:srgbClr val="E7F0F3"/>
-                </a:solidFill>
-                <a:latin typeface="Arial"/>
-              </a:rPr>
-              <a:t>Radial growth alone has no preferred jet direction</a:t>
-            </a:r>
-          </a:p>
-        </p:txBody>
-      </p:sp>
-      <p:sp>
-        <p:nvSpPr>
-          <p:cNvPr id="29" name="text 27" descr="sci-ppt:obj-027"/>
-          <p:cNvSpPr txBox="1"/>
-          <p:nvPr/>
-        </p:nvSpPr>
-        <p:spPr>
-          <a:xfrm>
-            <a:off x="365760" y="4654296"/>
-            <a:ext cx="8412480" cy="310896"/>
-          </a:xfrm>
-          <a:prstGeom prst="rect">
-            <a:avLst/>
-          </a:prstGeom>
-          <a:noFill/>
-          <a:effectLst/>
-        </p:spPr>
-        <p:txBody>
-          <a:bodyPr wrap="none" lIns="0" rIns="0" tIns="0" bIns="0" anchor="ctr">
-            <a:spAutoFit/>
-          </a:bodyPr>
-          <a:lstStyle/>
-          <a:p>
-            <a:pPr algn="l">
-              <a:spcAft>
-                <a:spcPts val="0"/>
-              </a:spcAft>
-            </a:pPr>
-            <a:r>
-              <a:rPr sz="1152" b="0" i="0">
-                <a:solidFill>
-                  <a:srgbClr val="E7F0F3"/>
-                </a:solidFill>
-                <a:latin typeface="Arial"/>
-              </a:rPr>
-              <a:t>An outlet or a deforming solid supplies another problem</a:t>
+              <a:t>Original answer recalled: Eq. A-E11 (Defence 1).</a:t>
             </a:r>
           </a:p>
         </p:txBody>
